--- a/Blessed Assurance-CH.pptx
+++ b/Blessed Assurance-CH.pptx
@@ -265,7 +265,7 @@
           <a:p>
             <a:fld id="{E759A0DE-F190-5444-87AC-4719D5F20D15}" type="datetimeFigureOut">
               <a:rPr lang="en-US" smtClean="0"/>
-              <a:t>10/16/26</a:t>
+              <a:t>10/17/26</a:t>
             </a:fld>
             <a:endParaRPr lang="en-US"/>
           </a:p>
@@ -463,7 +463,7 @@
           <a:p>
             <a:fld id="{E759A0DE-F190-5444-87AC-4719D5F20D15}" type="datetimeFigureOut">
               <a:rPr lang="en-US" smtClean="0"/>
-              <a:t>10/16/26</a:t>
+              <a:t>10/17/26</a:t>
             </a:fld>
             <a:endParaRPr lang="en-US"/>
           </a:p>
@@ -671,7 +671,7 @@
           <a:p>
             <a:fld id="{E759A0DE-F190-5444-87AC-4719D5F20D15}" type="datetimeFigureOut">
               <a:rPr lang="en-US" smtClean="0"/>
-              <a:t>10/16/26</a:t>
+              <a:t>10/17/26</a:t>
             </a:fld>
             <a:endParaRPr lang="en-US"/>
           </a:p>
@@ -869,7 +869,7 @@
           <a:p>
             <a:fld id="{E759A0DE-F190-5444-87AC-4719D5F20D15}" type="datetimeFigureOut">
               <a:rPr lang="en-US" smtClean="0"/>
-              <a:t>10/16/26</a:t>
+              <a:t>10/17/26</a:t>
             </a:fld>
             <a:endParaRPr lang="en-US"/>
           </a:p>
@@ -1144,7 +1144,7 @@
           <a:p>
             <a:fld id="{E759A0DE-F190-5444-87AC-4719D5F20D15}" type="datetimeFigureOut">
               <a:rPr lang="en-US" smtClean="0"/>
-              <a:t>10/16/26</a:t>
+              <a:t>10/17/26</a:t>
             </a:fld>
             <a:endParaRPr lang="en-US"/>
           </a:p>
@@ -1409,7 +1409,7 @@
           <a:p>
             <a:fld id="{E759A0DE-F190-5444-87AC-4719D5F20D15}" type="datetimeFigureOut">
               <a:rPr lang="en-US" smtClean="0"/>
-              <a:t>10/16/26</a:t>
+              <a:t>10/17/26</a:t>
             </a:fld>
             <a:endParaRPr lang="en-US"/>
           </a:p>
@@ -1821,7 +1821,7 @@
           <a:p>
             <a:fld id="{E759A0DE-F190-5444-87AC-4719D5F20D15}" type="datetimeFigureOut">
               <a:rPr lang="en-US" smtClean="0"/>
-              <a:t>10/16/26</a:t>
+              <a:t>10/17/26</a:t>
             </a:fld>
             <a:endParaRPr lang="en-US"/>
           </a:p>
@@ -1962,7 +1962,7 @@
           <a:p>
             <a:fld id="{E759A0DE-F190-5444-87AC-4719D5F20D15}" type="datetimeFigureOut">
               <a:rPr lang="en-US" smtClean="0"/>
-              <a:t>10/16/26</a:t>
+              <a:t>10/17/26</a:t>
             </a:fld>
             <a:endParaRPr lang="en-US"/>
           </a:p>
@@ -2075,7 +2075,7 @@
           <a:p>
             <a:fld id="{E759A0DE-F190-5444-87AC-4719D5F20D15}" type="datetimeFigureOut">
               <a:rPr lang="en-US" smtClean="0"/>
-              <a:t>10/16/26</a:t>
+              <a:t>10/17/26</a:t>
             </a:fld>
             <a:endParaRPr lang="en-US"/>
           </a:p>
@@ -2386,7 +2386,7 @@
           <a:p>
             <a:fld id="{E759A0DE-F190-5444-87AC-4719D5F20D15}" type="datetimeFigureOut">
               <a:rPr lang="en-US" smtClean="0"/>
-              <a:t>10/16/26</a:t>
+              <a:t>10/17/26</a:t>
             </a:fld>
             <a:endParaRPr lang="en-US"/>
           </a:p>
@@ -2674,7 +2674,7 @@
           <a:p>
             <a:fld id="{E759A0DE-F190-5444-87AC-4719D5F20D15}" type="datetimeFigureOut">
               <a:rPr lang="en-US" smtClean="0"/>
-              <a:t>10/16/26</a:t>
+              <a:t>10/17/26</a:t>
             </a:fld>
             <a:endParaRPr lang="en-US"/>
           </a:p>
@@ -2915,7 +2915,7 @@
           <a:p>
             <a:fld id="{E759A0DE-F190-5444-87AC-4719D5F20D15}" type="datetimeFigureOut">
               <a:rPr lang="en-US" smtClean="0"/>
-              <a:t>10/16/26</a:t>
+              <a:t>10/17/26</a:t>
             </a:fld>
             <a:endParaRPr lang="en-US"/>
           </a:p>
@@ -3954,7 +3954,7 @@
                 <a:latin typeface="Avenir Medium" panose="02000503020000020003" pitchFamily="2" charset="0"/>
                 <a:ea typeface="Bodoni Ornaments" pitchFamily="2" charset="0"/>
               </a:rPr>
-              <a:t>                Am                        C</a:t>
+              <a:t>                Am	G        F           G</a:t>
             </a:r>
           </a:p>
           <a:p>
@@ -3980,7 +3980,7 @@
                 <a:latin typeface="Avenir Medium" panose="02000503020000020003" pitchFamily="2" charset="0"/>
                 <a:ea typeface="Bodoni Ornaments" pitchFamily="2" charset="0"/>
               </a:rPr>
-              <a:t>                 C        G                 C</a:t>
+              <a:t>                 C        F                 G</a:t>
             </a:r>
           </a:p>
           <a:p>
@@ -4052,15 +4052,40 @@
           </a:bodyPr>
           <a:lstStyle/>
           <a:p>
-            <a:pPr algn="r"/>
-            <a:r>
-              <a:rPr lang="en-US" sz="3600" b="1" dirty="0">
-                <a:solidFill>
-                  <a:schemeClr val="accent6">
+            <a:pPr marL="0" marR="0" lvl="0" indent="0" algn="r" defTabSz="914400" rtl="0" eaLnBrk="1" fontAlgn="auto" latinLnBrk="0" hangingPunct="1">
+              <a:lnSpc>
+                <a:spcPct val="100000"/>
+              </a:lnSpc>
+              <a:spcBef>
+                <a:spcPts val="0"/>
+              </a:spcBef>
+              <a:spcAft>
+                <a:spcPts val="0"/>
+              </a:spcAft>
+              <a:buClrTx/>
+              <a:buSzTx/>
+              <a:buFontTx/>
+              <a:buNone/>
+              <a:tabLst/>
+              <a:defRPr/>
+            </a:pPr>
+            <a:r>
+              <a:rPr kumimoji="0" lang="en-US" sz="3600" b="1" i="0" u="none" strike="noStrike" kern="1200" cap="none" spc="0" normalizeH="0" baseline="0" noProof="0" dirty="0">
+                <a:ln>
+                  <a:noFill/>
+                </a:ln>
+                <a:solidFill>
+                  <a:srgbClr val="4EA72E">
                     <a:lumMod val="20000"/>
                     <a:lumOff val="80000"/>
-                  </a:schemeClr>
-                </a:solidFill>
+                  </a:srgbClr>
+                </a:solidFill>
+                <a:effectLst/>
+                <a:uLnTx/>
+                <a:uFillTx/>
+                <a:latin typeface="Aptos" panose="02110004020202020204"/>
+                <a:ea typeface="+mn-ea"/>
+                <a:cs typeface="+mn-cs"/>
               </a:rPr>
               <a:t>To CHORUS</a:t>
             </a:r>
@@ -4189,7 +4214,7 @@
                 <a:latin typeface="Avenir Medium" panose="02000503020000020003" pitchFamily="2" charset="0"/>
                 <a:ea typeface="Bodoni Ornaments" pitchFamily="2" charset="0"/>
               </a:rPr>
-              <a:t>                    F                           G</a:t>
+              <a:t>                    F             G			C</a:t>
             </a:r>
           </a:p>
           <a:p>
@@ -4287,15 +4312,40 @@
           </a:bodyPr>
           <a:lstStyle/>
           <a:p>
-            <a:pPr algn="r"/>
-            <a:r>
-              <a:rPr lang="en-US" sz="3600" b="1" dirty="0">
-                <a:solidFill>
-                  <a:schemeClr val="accent6">
+            <a:pPr marL="0" marR="0" lvl="0" indent="0" algn="r" defTabSz="914400" rtl="0" eaLnBrk="1" fontAlgn="auto" latinLnBrk="0" hangingPunct="1">
+              <a:lnSpc>
+                <a:spcPct val="100000"/>
+              </a:lnSpc>
+              <a:spcBef>
+                <a:spcPts val="0"/>
+              </a:spcBef>
+              <a:spcAft>
+                <a:spcPts val="0"/>
+              </a:spcAft>
+              <a:buClrTx/>
+              <a:buSzTx/>
+              <a:buFontTx/>
+              <a:buNone/>
+              <a:tabLst/>
+              <a:defRPr/>
+            </a:pPr>
+            <a:r>
+              <a:rPr kumimoji="0" lang="en-US" sz="3600" b="1" i="0" u="none" strike="noStrike" kern="1200" cap="none" spc="0" normalizeH="0" baseline="0" noProof="0" dirty="0">
+                <a:ln>
+                  <a:noFill/>
+                </a:ln>
+                <a:solidFill>
+                  <a:srgbClr val="4EA72E">
                     <a:lumMod val="20000"/>
                     <a:lumOff val="80000"/>
-                  </a:schemeClr>
-                </a:solidFill>
+                  </a:srgbClr>
+                </a:solidFill>
+                <a:effectLst/>
+                <a:uLnTx/>
+                <a:uFillTx/>
+                <a:latin typeface="Aptos" panose="02110004020202020204"/>
+                <a:ea typeface="+mn-ea"/>
+                <a:cs typeface="+mn-cs"/>
               </a:rPr>
               <a:t>To VERSE 2</a:t>
             </a:r>
@@ -4419,7 +4469,7 @@
                 <a:latin typeface="Avenir Medium" panose="02000503020000020003" pitchFamily="2" charset="0"/>
                 <a:ea typeface="Bodoni Ornaments" pitchFamily="2" charset="0"/>
               </a:rPr>
-              <a:t>                 Am                                   G</a:t>
+              <a:t>                 Am	G        F           G</a:t>
             </a:r>
           </a:p>
           <a:p>
@@ -4445,7 +4495,7 @@
                 <a:latin typeface="Avenir Medium" panose="02000503020000020003" pitchFamily="2" charset="0"/>
                 <a:ea typeface="Bodoni Ornaments" pitchFamily="2" charset="0"/>
               </a:rPr>
-              <a:t>                   C          G                C</a:t>
+              <a:t>                   C        F                 G</a:t>
             </a:r>
           </a:p>
           <a:p>
@@ -4517,15 +4567,40 @@
           </a:bodyPr>
           <a:lstStyle/>
           <a:p>
-            <a:pPr algn="r"/>
-            <a:r>
-              <a:rPr lang="en-US" sz="3600" b="1" dirty="0">
-                <a:solidFill>
-                  <a:schemeClr val="accent6">
+            <a:pPr marL="0" marR="0" lvl="0" indent="0" algn="r" defTabSz="914400" rtl="0" eaLnBrk="1" fontAlgn="auto" latinLnBrk="0" hangingPunct="1">
+              <a:lnSpc>
+                <a:spcPct val="100000"/>
+              </a:lnSpc>
+              <a:spcBef>
+                <a:spcPts val="0"/>
+              </a:spcBef>
+              <a:spcAft>
+                <a:spcPts val="0"/>
+              </a:spcAft>
+              <a:buClrTx/>
+              <a:buSzTx/>
+              <a:buFontTx/>
+              <a:buNone/>
+              <a:tabLst/>
+              <a:defRPr/>
+            </a:pPr>
+            <a:r>
+              <a:rPr kumimoji="0" lang="en-US" sz="3600" b="1" i="0" u="none" strike="noStrike" kern="1200" cap="none" spc="0" normalizeH="0" baseline="0" noProof="0" dirty="0">
+                <a:ln>
+                  <a:noFill/>
+                </a:ln>
+                <a:solidFill>
+                  <a:srgbClr val="4EA72E">
                     <a:lumMod val="20000"/>
                     <a:lumOff val="80000"/>
-                  </a:schemeClr>
-                </a:solidFill>
+                  </a:srgbClr>
+                </a:solidFill>
+                <a:effectLst/>
+                <a:uLnTx/>
+                <a:uFillTx/>
+                <a:latin typeface="Aptos" panose="02110004020202020204"/>
+                <a:ea typeface="+mn-ea"/>
+                <a:cs typeface="+mn-cs"/>
               </a:rPr>
               <a:t>To CHORUS</a:t>
             </a:r>
@@ -4654,7 +4729,7 @@
                 <a:latin typeface="Avenir Medium" panose="02000503020000020003" pitchFamily="2" charset="0"/>
                 <a:ea typeface="Bodoni Ornaments" pitchFamily="2" charset="0"/>
               </a:rPr>
-              <a:t>                    F                           G</a:t>
+              <a:t>                     F             G			C</a:t>
             </a:r>
           </a:p>
           <a:p>
@@ -4752,29 +4827,79 @@
           </a:bodyPr>
           <a:lstStyle/>
           <a:p>
-            <a:pPr algn="r"/>
-            <a:r>
-              <a:rPr lang="en-US" sz="3600" b="1" dirty="0">
-                <a:solidFill>
-                  <a:schemeClr val="accent6">
+            <a:pPr marL="0" marR="0" lvl="0" indent="0" algn="r" defTabSz="914400" rtl="0" eaLnBrk="1" fontAlgn="auto" latinLnBrk="0" hangingPunct="1">
+              <a:lnSpc>
+                <a:spcPct val="100000"/>
+              </a:lnSpc>
+              <a:spcBef>
+                <a:spcPts val="0"/>
+              </a:spcBef>
+              <a:spcAft>
+                <a:spcPts val="0"/>
+              </a:spcAft>
+              <a:buClrTx/>
+              <a:buSzTx/>
+              <a:buFontTx/>
+              <a:buNone/>
+              <a:tabLst/>
+              <a:defRPr/>
+            </a:pPr>
+            <a:r>
+              <a:rPr kumimoji="0" lang="en-US" sz="3600" b="1" i="0" u="none" strike="noStrike" kern="1200" cap="none" spc="0" normalizeH="0" baseline="0" noProof="0" dirty="0">
+                <a:ln>
+                  <a:noFill/>
+                </a:ln>
+                <a:solidFill>
+                  <a:srgbClr val="4EA72E">
                     <a:lumMod val="20000"/>
                     <a:lumOff val="80000"/>
-                  </a:schemeClr>
-                </a:solidFill>
+                  </a:srgbClr>
+                </a:solidFill>
+                <a:effectLst/>
+                <a:uLnTx/>
+                <a:uFillTx/>
+                <a:latin typeface="Aptos" panose="02110004020202020204"/>
+                <a:ea typeface="+mn-ea"/>
+                <a:cs typeface="+mn-cs"/>
               </a:rPr>
               <a:t>Drums dies out</a:t>
             </a:r>
           </a:p>
           <a:p>
-            <a:pPr algn="r"/>
-            <a:r>
-              <a:rPr lang="en-US" sz="3600" b="1" dirty="0">
-                <a:solidFill>
-                  <a:schemeClr val="accent6">
+            <a:pPr marL="0" marR="0" lvl="0" indent="0" algn="r" defTabSz="914400" rtl="0" eaLnBrk="1" fontAlgn="auto" latinLnBrk="0" hangingPunct="1">
+              <a:lnSpc>
+                <a:spcPct val="100000"/>
+              </a:lnSpc>
+              <a:spcBef>
+                <a:spcPts val="0"/>
+              </a:spcBef>
+              <a:spcAft>
+                <a:spcPts val="0"/>
+              </a:spcAft>
+              <a:buClrTx/>
+              <a:buSzTx/>
+              <a:buFontTx/>
+              <a:buNone/>
+              <a:tabLst/>
+              <a:defRPr/>
+            </a:pPr>
+            <a:r>
+              <a:rPr kumimoji="0" lang="en-US" sz="3600" b="1" i="0" u="none" strike="noStrike" kern="1200" cap="none" spc="0" normalizeH="0" baseline="0" noProof="0" dirty="0">
+                <a:ln>
+                  <a:noFill/>
+                </a:ln>
+                <a:solidFill>
+                  <a:srgbClr val="4EA72E">
                     <a:lumMod val="20000"/>
                     <a:lumOff val="80000"/>
-                  </a:schemeClr>
-                </a:solidFill>
+                  </a:srgbClr>
+                </a:solidFill>
+                <a:effectLst/>
+                <a:uLnTx/>
+                <a:uFillTx/>
+                <a:latin typeface="Aptos" panose="02110004020202020204"/>
+                <a:ea typeface="+mn-ea"/>
+                <a:cs typeface="+mn-cs"/>
               </a:rPr>
               <a:t>To VERSE3</a:t>
             </a:r>
@@ -4898,7 +5023,7 @@
                 <a:latin typeface="Avenir Medium" panose="02000503020000020003" pitchFamily="2" charset="0"/>
                 <a:ea typeface="Bodoni Ornaments" pitchFamily="2" charset="0"/>
               </a:rPr>
-              <a:t>           Am                              G</a:t>
+              <a:t>           Am	G        F           G</a:t>
             </a:r>
           </a:p>
           <a:p>
@@ -4924,7 +5049,7 @@
                 <a:latin typeface="Avenir Medium" panose="02000503020000020003" pitchFamily="2" charset="0"/>
                 <a:ea typeface="Bodoni Ornaments" pitchFamily="2" charset="0"/>
               </a:rPr>
-              <a:t>                           C       G          C</a:t>
+              <a:t>                           C        F                 G</a:t>
             </a:r>
           </a:p>
           <a:p>
@@ -4996,29 +5121,79 @@
           </a:bodyPr>
           <a:lstStyle/>
           <a:p>
-            <a:pPr algn="r"/>
-            <a:r>
-              <a:rPr lang="en-US" sz="3600" b="1" dirty="0">
-                <a:solidFill>
-                  <a:schemeClr val="accent6">
+            <a:pPr marL="0" marR="0" lvl="0" indent="0" algn="r" defTabSz="914400" rtl="0" eaLnBrk="1" fontAlgn="auto" latinLnBrk="0" hangingPunct="1">
+              <a:lnSpc>
+                <a:spcPct val="100000"/>
+              </a:lnSpc>
+              <a:spcBef>
+                <a:spcPts val="0"/>
+              </a:spcBef>
+              <a:spcAft>
+                <a:spcPts val="0"/>
+              </a:spcAft>
+              <a:buClrTx/>
+              <a:buSzTx/>
+              <a:buFontTx/>
+              <a:buNone/>
+              <a:tabLst/>
+              <a:defRPr/>
+            </a:pPr>
+            <a:r>
+              <a:rPr kumimoji="0" lang="en-US" sz="3600" b="1" i="0" u="none" strike="noStrike" kern="1200" cap="none" spc="0" normalizeH="0" baseline="0" noProof="0" dirty="0">
+                <a:ln>
+                  <a:noFill/>
+                </a:ln>
+                <a:solidFill>
+                  <a:srgbClr val="4EA72E">
                     <a:lumMod val="20000"/>
                     <a:lumOff val="80000"/>
-                  </a:schemeClr>
-                </a:solidFill>
+                  </a:srgbClr>
+                </a:solidFill>
+                <a:effectLst/>
+                <a:uLnTx/>
+                <a:uFillTx/>
+                <a:latin typeface="Aptos" panose="02110004020202020204"/>
+                <a:ea typeface="+mn-ea"/>
+                <a:cs typeface="+mn-cs"/>
               </a:rPr>
               <a:t>DRUMS build at end </a:t>
             </a:r>
           </a:p>
           <a:p>
-            <a:pPr algn="r"/>
-            <a:r>
-              <a:rPr lang="en-US" sz="3600" b="1" dirty="0">
-                <a:solidFill>
-                  <a:schemeClr val="accent6">
+            <a:pPr marL="0" marR="0" lvl="0" indent="0" algn="r" defTabSz="914400" rtl="0" eaLnBrk="1" fontAlgn="auto" latinLnBrk="0" hangingPunct="1">
+              <a:lnSpc>
+                <a:spcPct val="100000"/>
+              </a:lnSpc>
+              <a:spcBef>
+                <a:spcPts val="0"/>
+              </a:spcBef>
+              <a:spcAft>
+                <a:spcPts val="0"/>
+              </a:spcAft>
+              <a:buClrTx/>
+              <a:buSzTx/>
+              <a:buFontTx/>
+              <a:buNone/>
+              <a:tabLst/>
+              <a:defRPr/>
+            </a:pPr>
+            <a:r>
+              <a:rPr kumimoji="0" lang="en-US" sz="3600" b="1" i="0" u="none" strike="noStrike" kern="1200" cap="none" spc="0" normalizeH="0" baseline="0" noProof="0" dirty="0">
+                <a:ln>
+                  <a:noFill/>
+                </a:ln>
+                <a:solidFill>
+                  <a:srgbClr val="4EA72E">
                     <a:lumMod val="20000"/>
                     <a:lumOff val="80000"/>
-                  </a:schemeClr>
-                </a:solidFill>
+                  </a:srgbClr>
+                </a:solidFill>
+                <a:effectLst/>
+                <a:uLnTx/>
+                <a:uFillTx/>
+                <a:latin typeface="Aptos" panose="02110004020202020204"/>
+                <a:ea typeface="+mn-ea"/>
+                <a:cs typeface="+mn-cs"/>
               </a:rPr>
               <a:t>To CHORUS</a:t>
             </a:r>
@@ -5147,7 +5322,7 @@
                 <a:latin typeface="Avenir Medium" panose="02000503020000020003" pitchFamily="2" charset="0"/>
                 <a:ea typeface="Bodoni Ornaments" pitchFamily="2" charset="0"/>
               </a:rPr>
-              <a:t>                    F                           G</a:t>
+              <a:t>                   F             G			C</a:t>
             </a:r>
           </a:p>
           <a:p>
@@ -5245,15 +5420,40 @@
           </a:bodyPr>
           <a:lstStyle/>
           <a:p>
-            <a:pPr algn="r"/>
-            <a:r>
-              <a:rPr lang="en-US" sz="3600" b="1" dirty="0">
-                <a:solidFill>
-                  <a:schemeClr val="accent6">
+            <a:pPr marL="0" marR="0" lvl="0" indent="0" algn="r" defTabSz="914400" rtl="0" eaLnBrk="1" fontAlgn="auto" latinLnBrk="0" hangingPunct="1">
+              <a:lnSpc>
+                <a:spcPct val="100000"/>
+              </a:lnSpc>
+              <a:spcBef>
+                <a:spcPts val="0"/>
+              </a:spcBef>
+              <a:spcAft>
+                <a:spcPts val="0"/>
+              </a:spcAft>
+              <a:buClrTx/>
+              <a:buSzTx/>
+              <a:buFontTx/>
+              <a:buNone/>
+              <a:tabLst/>
+              <a:defRPr/>
+            </a:pPr>
+            <a:r>
+              <a:rPr kumimoji="0" lang="en-US" sz="3600" b="1" i="0" u="none" strike="noStrike" kern="1200" cap="none" spc="0" normalizeH="0" baseline="0" noProof="0" dirty="0">
+                <a:ln>
+                  <a:noFill/>
+                </a:ln>
+                <a:solidFill>
+                  <a:srgbClr val="4EA72E">
                     <a:lumMod val="20000"/>
                     <a:lumOff val="80000"/>
-                  </a:schemeClr>
-                </a:solidFill>
+                  </a:srgbClr>
+                </a:solidFill>
+                <a:effectLst/>
+                <a:uLnTx/>
+                <a:uFillTx/>
+                <a:latin typeface="Aptos" panose="02110004020202020204"/>
+                <a:ea typeface="+mn-ea"/>
+                <a:cs typeface="+mn-cs"/>
               </a:rPr>
               <a:t>REPEAT &amp; END</a:t>
             </a:r>
